--- a/TrainerDocs/Session_02_AI_for_Research_Synthesis_Executive_Communication.pptx
+++ b/TrainerDocs/Session_02_AI_for_Research_Synthesis_Executive_Communication.pptx
@@ -237,7 +237,7 @@
           <a:p>
             <a:fld id="{A0C6FC1B-C662-4BB5-BF1B-41DBBE7F8DCE}" type="datetimeFigureOut">
               <a:rPr lang="en-IN" smtClean="0"/>
-              <a:t>18-10-2026</a:t>
+              <a:t>19-10-2026</a:t>
             </a:fld>
             <a:endParaRPr lang="en-IN"/>
           </a:p>
@@ -684,7 +684,7 @@
           <a:p>
             <a:fld id="{3855681C-4770-4BB3-860E-1F6253F7231B}" type="datetime1">
               <a:rPr lang="en-US" smtClean="0"/>
-              <a:t>10/18/2026</a:t>
+              <a:t>10/19/2026</a:t>
             </a:fld>
             <a:endParaRPr lang="en-US"/>
           </a:p>
@@ -852,7 +852,7 @@
           <a:p>
             <a:fld id="{8DCEEE96-3B33-4BF6-A2AE-77B67157D4D9}" type="datetime1">
               <a:rPr lang="en-US" smtClean="0"/>
-              <a:t>10/18/2026</a:t>
+              <a:t>10/19/2026</a:t>
             </a:fld>
             <a:endParaRPr lang="en-US"/>
           </a:p>
@@ -1030,7 +1030,7 @@
           <a:p>
             <a:fld id="{EB2477F1-DA39-46D7-A6DF-E7B8E6D3CFC2}" type="datetime1">
               <a:rPr lang="en-US" smtClean="0"/>
-              <a:t>10/18/2026</a:t>
+              <a:t>10/19/2026</a:t>
             </a:fld>
             <a:endParaRPr lang="en-US"/>
           </a:p>
@@ -1198,7 +1198,7 @@
           <a:p>
             <a:fld id="{32F8DF85-F7F7-47D3-A9C1-393C23328502}" type="datetime1">
               <a:rPr lang="en-US" smtClean="0"/>
-              <a:t>10/18/2026</a:t>
+              <a:t>10/19/2026</a:t>
             </a:fld>
             <a:endParaRPr lang="en-US"/>
           </a:p>
@@ -1443,7 +1443,7 @@
           <a:p>
             <a:fld id="{CD1E5112-F086-42E9-890E-1C75CA2469A0}" type="datetime1">
               <a:rPr lang="en-US" smtClean="0"/>
-              <a:t>10/18/2026</a:t>
+              <a:t>10/19/2026</a:t>
             </a:fld>
             <a:endParaRPr lang="en-US"/>
           </a:p>
@@ -1728,7 +1728,7 @@
           <a:p>
             <a:fld id="{B33BA87E-A275-4146-A496-D71093480677}" type="datetime1">
               <a:rPr lang="en-US" smtClean="0"/>
-              <a:t>10/18/2026</a:t>
+              <a:t>10/19/2026</a:t>
             </a:fld>
             <a:endParaRPr lang="en-US"/>
           </a:p>
@@ -2147,7 +2147,7 @@
           <a:p>
             <a:fld id="{6F989B00-6D15-4BE0-B0CF-2711944832A4}" type="datetime1">
               <a:rPr lang="en-US" smtClean="0"/>
-              <a:t>10/18/2026</a:t>
+              <a:t>10/19/2026</a:t>
             </a:fld>
             <a:endParaRPr lang="en-US"/>
           </a:p>
@@ -2264,7 +2264,7 @@
           <a:p>
             <a:fld id="{B00004A0-38EF-4565-93D3-A6DFB0D0F2C1}" type="datetime1">
               <a:rPr lang="en-US" smtClean="0"/>
-              <a:t>10/18/2026</a:t>
+              <a:t>10/19/2026</a:t>
             </a:fld>
             <a:endParaRPr lang="en-US"/>
           </a:p>
@@ -2359,7 +2359,7 @@
           <a:p>
             <a:fld id="{0E94F39A-CD75-43B2-A9FB-9F6E89C3F25F}" type="datetime1">
               <a:rPr lang="en-US" smtClean="0"/>
-              <a:t>10/18/2026</a:t>
+              <a:t>10/19/2026</a:t>
             </a:fld>
             <a:endParaRPr lang="en-US"/>
           </a:p>
@@ -2639,7 +2639,7 @@
           <a:p>
             <a:fld id="{ACF14CED-CCB4-4F7F-AB75-B54F1C604561}" type="datetime1">
               <a:rPr lang="en-US" smtClean="0"/>
-              <a:t>10/18/2026</a:t>
+              <a:t>10/19/2026</a:t>
             </a:fld>
             <a:endParaRPr lang="en-US"/>
           </a:p>
@@ -2891,7 +2891,7 @@
           <a:p>
             <a:fld id="{F148A14B-C671-4A50-8716-D9F5D84DB082}" type="datetime1">
               <a:rPr lang="en-US" smtClean="0"/>
-              <a:t>10/18/2026</a:t>
+              <a:t>10/19/2026</a:t>
             </a:fld>
             <a:endParaRPr lang="en-US"/>
           </a:p>
@@ -3102,7 +3102,7 @@
           <a:p>
             <a:fld id="{0746D029-43BC-4FC2-B54D-2DC052C31630}" type="datetime1">
               <a:rPr lang="en-US" smtClean="0"/>
-              <a:t>10/18/2026</a:t>
+              <a:t>10/19/2026</a:t>
             </a:fld>
             <a:endParaRPr lang="en-US"/>
           </a:p>
@@ -21936,6 +21936,7 @@
               </a:defRPr>
             </a:pPr>
             <a:r>
+              <a:rPr dirty="0"/>
               <a:t>From information to a decision-ready briefing</a:t>
             </a:r>
           </a:p>
